--- a/activity/M03A02/M03A02.pptx
+++ b/activity/M03A02/M03A02.pptx
@@ -555,7 +555,7 @@
             <a:fld id="{53CE91DE-ABC6-4D22-89A0-1765B629FB43}" type="datetimeFigureOut">
               <a:rPr lang="es-CO" smtClean="0"/>
               <a:pPr/>
-              <a:t>17/11/2023</a:t>
+              <a:t>1/08/2025</a:t>
             </a:fld>
             <a:endParaRPr lang="es-CO"/>
           </a:p>
@@ -1008,7 +1008,7 @@
             <a:fld id="{43DF08CB-A55A-40B1-AEFD-F19B3CFD19B5}" type="datetimeFigureOut">
               <a:rPr lang="es-CO" smtClean="0"/>
               <a:pPr/>
-              <a:t>17/11/2023</a:t>
+              <a:t>1/08/2025</a:t>
             </a:fld>
             <a:endParaRPr lang="es-CO"/>
           </a:p>
@@ -1175,7 +1175,7 @@
             <a:fld id="{43DF08CB-A55A-40B1-AEFD-F19B3CFD19B5}" type="datetimeFigureOut">
               <a:rPr lang="es-CO" smtClean="0"/>
               <a:pPr/>
-              <a:t>17/11/2023</a:t>
+              <a:t>1/08/2025</a:t>
             </a:fld>
             <a:endParaRPr lang="es-CO"/>
           </a:p>
@@ -1352,7 +1352,7 @@
             <a:fld id="{43DF08CB-A55A-40B1-AEFD-F19B3CFD19B5}" type="datetimeFigureOut">
               <a:rPr lang="es-CO" smtClean="0"/>
               <a:pPr/>
-              <a:t>17/11/2023</a:t>
+              <a:t>1/08/2025</a:t>
             </a:fld>
             <a:endParaRPr lang="es-CO"/>
           </a:p>
@@ -1519,7 +1519,7 @@
             <a:fld id="{43DF08CB-A55A-40B1-AEFD-F19B3CFD19B5}" type="datetimeFigureOut">
               <a:rPr lang="es-CO" smtClean="0"/>
               <a:pPr/>
-              <a:t>17/11/2023</a:t>
+              <a:t>1/08/2025</a:t>
             </a:fld>
             <a:endParaRPr lang="es-CO"/>
           </a:p>
@@ -1762,7 +1762,7 @@
             <a:fld id="{43DF08CB-A55A-40B1-AEFD-F19B3CFD19B5}" type="datetimeFigureOut">
               <a:rPr lang="es-CO" smtClean="0"/>
               <a:pPr/>
-              <a:t>17/11/2023</a:t>
+              <a:t>1/08/2025</a:t>
             </a:fld>
             <a:endParaRPr lang="es-CO"/>
           </a:p>
@@ -2047,7 +2047,7 @@
             <a:fld id="{43DF08CB-A55A-40B1-AEFD-F19B3CFD19B5}" type="datetimeFigureOut">
               <a:rPr lang="es-CO" smtClean="0"/>
               <a:pPr/>
-              <a:t>17/11/2023</a:t>
+              <a:t>1/08/2025</a:t>
             </a:fld>
             <a:endParaRPr lang="es-CO"/>
           </a:p>
@@ -2466,7 +2466,7 @@
             <a:fld id="{43DF08CB-A55A-40B1-AEFD-F19B3CFD19B5}" type="datetimeFigureOut">
               <a:rPr lang="es-CO" smtClean="0"/>
               <a:pPr/>
-              <a:t>17/11/2023</a:t>
+              <a:t>1/08/2025</a:t>
             </a:fld>
             <a:endParaRPr lang="es-CO"/>
           </a:p>
@@ -2581,7 +2581,7 @@
             <a:fld id="{43DF08CB-A55A-40B1-AEFD-F19B3CFD19B5}" type="datetimeFigureOut">
               <a:rPr lang="es-CO" smtClean="0"/>
               <a:pPr/>
-              <a:t>17/11/2023</a:t>
+              <a:t>1/08/2025</a:t>
             </a:fld>
             <a:endParaRPr lang="es-CO"/>
           </a:p>
@@ -2673,7 +2673,7 @@
             <a:fld id="{43DF08CB-A55A-40B1-AEFD-F19B3CFD19B5}" type="datetimeFigureOut">
               <a:rPr lang="es-CO" smtClean="0"/>
               <a:pPr/>
-              <a:t>17/11/2023</a:t>
+              <a:t>1/08/2025</a:t>
             </a:fld>
             <a:endParaRPr lang="es-CO"/>
           </a:p>
@@ -2947,7 +2947,7 @@
             <a:fld id="{43DF08CB-A55A-40B1-AEFD-F19B3CFD19B5}" type="datetimeFigureOut">
               <a:rPr lang="es-CO" smtClean="0"/>
               <a:pPr/>
-              <a:t>17/11/2023</a:t>
+              <a:t>1/08/2025</a:t>
             </a:fld>
             <a:endParaRPr lang="es-CO"/>
           </a:p>
@@ -3197,7 +3197,7 @@
             <a:fld id="{43DF08CB-A55A-40B1-AEFD-F19B3CFD19B5}" type="datetimeFigureOut">
               <a:rPr lang="es-CO" smtClean="0"/>
               <a:pPr/>
-              <a:t>17/11/2023</a:t>
+              <a:t>1/08/2025</a:t>
             </a:fld>
             <a:endParaRPr lang="es-CO"/>
           </a:p>
@@ -3410,7 +3410,7 @@
             <a:fld id="{43DF08CB-A55A-40B1-AEFD-F19B3CFD19B5}" type="datetimeFigureOut">
               <a:rPr lang="es-CO" smtClean="0"/>
               <a:pPr/>
-              <a:t>17/11/2023</a:t>
+              <a:t>1/08/2025</a:t>
             </a:fld>
             <a:endParaRPr lang="es-CO"/>
           </a:p>
@@ -6740,7 +6740,7 @@
         <p:spPr>
           <a:xfrm>
             <a:off x="2923147" y="1166842"/>
-            <a:ext cx="6345705" cy="4708981"/>
+            <a:ext cx="6345705" cy="4955203"/>
           </a:xfrm>
           <a:prstGeom prst="rect">
             <a:avLst/>
@@ -6878,7 +6878,21 @@
                 <a:latin typeface="Segoe UI Light" panose="020B0502040204020203" pitchFamily="34" charset="0"/>
                 <a:cs typeface="Segoe UI Light" panose="020B0502040204020203" pitchFamily="34" charset="0"/>
               </a:rPr>
-              <a:t>Archivo GIS2RAS.RASImport.sdf generado desde HEC-GeoRAS. </a:t>
+              <a:t>Archivo GIS2RAS.RASImport.sdf generado desde HEC-GeoRAS o modelo HECRAS_v1 si creo la topología con RAS </a:t>
+            </a:r>
+            <a:r>
+              <a:rPr lang="es-ES" sz="1600" dirty="0" err="1">
+                <a:latin typeface="Segoe UI Light" panose="020B0502040204020203" pitchFamily="34" charset="0"/>
+                <a:cs typeface="Segoe UI Light" panose="020B0502040204020203" pitchFamily="34" charset="0"/>
+              </a:rPr>
+              <a:t>Mapper</a:t>
+            </a:r>
+            <a:r>
+              <a:rPr lang="es-ES" sz="1600" dirty="0">
+                <a:latin typeface="Segoe UI Light" panose="020B0502040204020203" pitchFamily="34" charset="0"/>
+                <a:cs typeface="Segoe UI Light" panose="020B0502040204020203" pitchFamily="34" charset="0"/>
+              </a:rPr>
+              <a:t>. </a:t>
             </a:r>
           </a:p>
           <a:p>
@@ -7070,7 +7084,7 @@
         <p:spPr>
           <a:xfrm>
             <a:off x="767408" y="904950"/>
-            <a:ext cx="3816424" cy="2554545"/>
+            <a:ext cx="3816424" cy="3785652"/>
           </a:xfrm>
           <a:prstGeom prst="rect">
             <a:avLst/>
@@ -7088,21 +7102,21 @@
                 <a:latin typeface="Segoe UI Light" panose="020B0502040204020203" pitchFamily="34" charset="0"/>
                 <a:cs typeface="Segoe UI Light" panose="020B0502040204020203" pitchFamily="34" charset="0"/>
               </a:rPr>
-              <a:t>En la carpeta de datos del proyecto (…\</a:t>
+              <a:t>En la carpeta de datos del proyecto (/file/</a:t>
             </a:r>
             <a:r>
               <a:rPr lang="es-CO" sz="1600" dirty="0" err="1">
                 <a:latin typeface="Segoe UI Light" panose="020B0502040204020203" pitchFamily="34" charset="0"/>
                 <a:cs typeface="Segoe UI Light" panose="020B0502040204020203" pitchFamily="34" charset="0"/>
               </a:rPr>
-              <a:t>Curso_DisenoFluvial</a:t>
+              <a:t>hec</a:t>
             </a:r>
             <a:r>
               <a:rPr lang="es-CO" sz="1600" dirty="0">
                 <a:latin typeface="Segoe UI Light" panose="020B0502040204020203" pitchFamily="34" charset="0"/>
                 <a:cs typeface="Segoe UI Light" panose="020B0502040204020203" pitchFamily="34" charset="0"/>
               </a:rPr>
-              <a:t>\Datos), cree un directorio con el nombre HECRAS_v1.</a:t>
+              <a:t>/), cree un directorio con el nombre HECRAS_v1. </a:t>
             </a:r>
           </a:p>
           <a:p>
@@ -7117,7 +7131,7 @@
                 <a:latin typeface="Segoe UI Light" panose="020B0502040204020203" pitchFamily="34" charset="0"/>
                 <a:cs typeface="Segoe UI Light" panose="020B0502040204020203" pitchFamily="34" charset="0"/>
               </a:rPr>
-              <a:t>Abra HEC-RAS 5.0.7 y cree un proyecto nuevo. Defina el sistema de unidades internacional (SI). </a:t>
+              <a:t>Abra HEC-RAS y cree un proyecto nuevo. Defina el sistema de unidades internacional (SI). </a:t>
             </a:r>
           </a:p>
           <a:p>
@@ -7134,6 +7148,55 @@
               </a:rPr>
               <a:t>Guarde el proyecto con el nombre HEC-RAS_v1.prj en la carpeta creada.</a:t>
             </a:r>
+          </a:p>
+          <a:p>
+            <a:endParaRPr lang="es-CO" sz="1600" dirty="0">
+              <a:latin typeface="Segoe UI Light" panose="020B0502040204020203" pitchFamily="34" charset="0"/>
+              <a:cs typeface="Segoe UI Light" panose="020B0502040204020203" pitchFamily="34" charset="0"/>
+            </a:endParaRPr>
+          </a:p>
+          <a:p>
+            <a:r>
+              <a:rPr lang="es-CO" sz="1600" dirty="0">
+                <a:latin typeface="Segoe UI Light" panose="020B0502040204020203" pitchFamily="34" charset="0"/>
+                <a:cs typeface="Segoe UI Light" panose="020B0502040204020203" pitchFamily="34" charset="0"/>
+              </a:rPr>
+              <a:t>Nota: sí creo el modelo topológico desde RAS </a:t>
+            </a:r>
+            <a:r>
+              <a:rPr lang="es-CO" sz="1600" dirty="0" err="1">
+                <a:latin typeface="Segoe UI Light" panose="020B0502040204020203" pitchFamily="34" charset="0"/>
+                <a:cs typeface="Segoe UI Light" panose="020B0502040204020203" pitchFamily="34" charset="0"/>
+              </a:rPr>
+              <a:t>Mapper</a:t>
+            </a:r>
+            <a:r>
+              <a:rPr lang="es-CO" sz="1600" dirty="0">
+                <a:latin typeface="Segoe UI Light" panose="020B0502040204020203" pitchFamily="34" charset="0"/>
+                <a:cs typeface="Segoe UI Light" panose="020B0502040204020203" pitchFamily="34" charset="0"/>
+              </a:rPr>
+              <a:t>, abra el modelo /file/</a:t>
+            </a:r>
+            <a:r>
+              <a:rPr lang="es-CO" sz="1600" dirty="0" err="1">
+                <a:latin typeface="Segoe UI Light" panose="020B0502040204020203" pitchFamily="34" charset="0"/>
+                <a:cs typeface="Segoe UI Light" panose="020B0502040204020203" pitchFamily="34" charset="0"/>
+              </a:rPr>
+              <a:t>hec</a:t>
+            </a:r>
+            <a:r>
+              <a:rPr lang="es-CO" sz="1600" dirty="0">
+                <a:latin typeface="Segoe UI Light" panose="020B0502040204020203" pitchFamily="34" charset="0"/>
+                <a:cs typeface="Segoe UI Light" panose="020B0502040204020203" pitchFamily="34" charset="0"/>
+              </a:rPr>
+              <a:t>/HECRAS_v1.</a:t>
+            </a:r>
+          </a:p>
+          <a:p>
+            <a:endParaRPr lang="es-CO" sz="1600" dirty="0">
+              <a:latin typeface="Segoe UI Light" panose="020B0502040204020203" pitchFamily="34" charset="0"/>
+              <a:cs typeface="Segoe UI Light" panose="020B0502040204020203" pitchFamily="34" charset="0"/>
+            </a:endParaRPr>
           </a:p>
         </p:txBody>
       </p:sp>
